--- a/m3/diapositivos/sessao-11-m3-f17.pptx
+++ b/m3/diapositivos/sessao-11-m3-f17.pptx
@@ -1963,6 +1963,23 @@
               <a:buNone/>
             </a:pPr>
             <a:r>
+              <a:rPr lang="en-US" sz="2200" i="1" dirty="0">
+                <a:solidFill>
+                  <a:srgbClr val="F2F0EA"/>
+                </a:solidFill>
+                <a:latin typeface="Arial" pitchFamily="34" charset="0"/>
+                <a:ea typeface="Arial" pitchFamily="34" charset="-122"/>
+                <a:cs typeface="Arial" pitchFamily="34" charset="-120"/>
+              </a:rPr>
+              <a:t>Os Lusíadas</a:t>
+            </a:r>
+            <a:pPr indent="0" marL="0">
+              <a:lnSpc>
+                <a:spcPct val="105000"/>
+              </a:lnSpc>
+              <a:buNone/>
+            </a:pPr>
+            <a:r>
               <a:rPr lang="en-US" sz="2200" dirty="0">
                 <a:solidFill>
                   <a:srgbClr val="F2F0EA"/>
@@ -1971,7 +1988,7 @@
                 <a:ea typeface="Arial" pitchFamily="34" charset="-122"/>
                 <a:cs typeface="Arial" pitchFamily="34" charset="-120"/>
               </a:rPr>
-              <a:t>Os Lusíadas cruzam quatro planos: a viagem de Vasco da Gama, a história de Portugal, a mitologia e as reflexões do Poeta.</a:t>
+              <a:t> cruzam quatro planos: a viagem de Vasco da Gama, a história de Portugal, a mitologia e as reflexões do Poeta.</a:t>
             </a:r>
             <a:endParaRPr lang="en-US" sz="2200" dirty="0"/>
           </a:p>
@@ -5076,7 +5093,41 @@
                 <a:ea typeface="Arial" pitchFamily="34" charset="-122"/>
                 <a:cs typeface="Arial" pitchFamily="34" charset="-120"/>
               </a:rPr>
-              <a:t>Quem conta, para quem, quem fica de fora: na cantiga de amigo, a rapariga fala na voz que um trovador lhe escreveu; em Os Lusíadas, as «terras» e a «gente remota» ficam de fora.</a:t>
+              <a:t>Quem conta, para quem, quem fica de fora: na cantiga de amigo, a rapariga fala na voz que um trovador lhe escreveu; em </a:t>
+            </a:r>
+            <a:pPr indent="0" marL="0">
+              <a:lnSpc>
+                <a:spcPct val="105000"/>
+              </a:lnSpc>
+              <a:buNone/>
+            </a:pPr>
+            <a:r>
+              <a:rPr lang="en-US" sz="2200" i="1" dirty="0">
+                <a:solidFill>
+                  <a:srgbClr val="F2F0EA"/>
+                </a:solidFill>
+                <a:latin typeface="Arial" pitchFamily="34" charset="0"/>
+                <a:ea typeface="Arial" pitchFamily="34" charset="-122"/>
+                <a:cs typeface="Arial" pitchFamily="34" charset="-120"/>
+              </a:rPr>
+              <a:t>Os Lusíadas</a:t>
+            </a:r>
+            <a:pPr indent="0" marL="0">
+              <a:lnSpc>
+                <a:spcPct val="105000"/>
+              </a:lnSpc>
+              <a:buNone/>
+            </a:pPr>
+            <a:r>
+              <a:rPr lang="en-US" sz="2200" dirty="0">
+                <a:solidFill>
+                  <a:srgbClr val="F2F0EA"/>
+                </a:solidFill>
+                <a:latin typeface="Arial" pitchFamily="34" charset="0"/>
+                <a:ea typeface="Arial" pitchFamily="34" charset="-122"/>
+                <a:cs typeface="Arial" pitchFamily="34" charset="-120"/>
+              </a:rPr>
+              <a:t>, as «terras» e a «gente remota» ficam de fora.</a:t>
             </a:r>
             <a:endParaRPr lang="en-US" sz="2200" dirty="0"/>
           </a:p>
